--- a/Presentation.pptx
+++ b/Presentation.pptx
@@ -14,6 +14,7 @@
     <p:sldId id="268" r:id="rId8"/>
     <p:sldId id="270" r:id="rId9"/>
     <p:sldId id="271" r:id="rId10"/>
+    <p:sldId id="272" r:id="rId11"/>
   </p:sldIdLst>
   <p:sldSz cx="12192000" cy="6858000"/>
   <p:notesSz cx="6858000" cy="9144000"/>
@@ -123,6 +124,7 @@
 <file path=ppt/revisionInfo.xml><?xml version="1.0" encoding="utf-8"?>
 <p1510:revInfo xmlns:a="http://schemas.openxmlformats.org/drawingml/2006/main" xmlns:r="http://schemas.openxmlformats.org/officeDocument/2006/relationships" xmlns:p1510="http://schemas.microsoft.com/office/powerpoint/2015/10/main">
   <p1510:revLst>
+    <p1510:client id="{37096994-4360-402A-8BEC-21E013E7A63F}" v="46" dt="2022-05-03T21:29:21.817"/>
     <p1510:client id="{3F35A6D6-16F4-4DDA-A503-D3D039A4C1FC}" v="222" dt="2022-05-01T16:00:28.632"/>
     <p1510:client id="{4B8022AB-3698-48A6-8578-0B6A8BA50E4B}" v="940" dt="2022-05-02T21:58:34.889"/>
     <p1510:client id="{7BD0BBD3-09D5-4BDF-813F-9545B39CCD0A}" v="14" dt="2022-04-28T20:29:58.016"/>
@@ -5945,6 +5947,184 @@
 </p:sld>
 </file>
 
+<file path=ppt/slides/slide10.xml><?xml version="1.0" encoding="utf-8"?>
+<p:sld xmlns:a="http://schemas.openxmlformats.org/drawingml/2006/main" xmlns:r="http://schemas.openxmlformats.org/officeDocument/2006/relationships" xmlns:p="http://schemas.openxmlformats.org/presentationml/2006/main">
+  <p:cSld>
+    <p:spTree>
+      <p:nvGrpSpPr>
+        <p:cNvPr id="1" name=""/>
+        <p:cNvGrpSpPr/>
+        <p:nvPr/>
+      </p:nvGrpSpPr>
+      <p:grpSpPr>
+        <a:xfrm>
+          <a:off x="0" y="0"/>
+          <a:ext cx="0" cy="0"/>
+          <a:chOff x="0" y="0"/>
+          <a:chExt cx="0" cy="0"/>
+        </a:xfrm>
+      </p:grpSpPr>
+      <p:sp>
+        <p:nvSpPr>
+          <p:cNvPr id="2" name="Title 1">
+            <a:extLst>
+              <a:ext uri="{FF2B5EF4-FFF2-40B4-BE49-F238E27FC236}">
+                <a16:creationId xmlns:a16="http://schemas.microsoft.com/office/drawing/2014/main" id="{EADFFE4B-B0B0-14D9-4A9B-F43524404ED7}"/>
+              </a:ext>
+            </a:extLst>
+          </p:cNvPr>
+          <p:cNvSpPr>
+            <a:spLocks noGrp="1"/>
+          </p:cNvSpPr>
+          <p:nvPr>
+            <p:ph type="title"/>
+          </p:nvPr>
+        </p:nvSpPr>
+        <p:spPr/>
+        <p:txBody>
+          <a:bodyPr/>
+          <a:lstStyle/>
+          <a:p>
+            <a:pPr algn="ctr"/>
+            <a:r>
+              <a:rPr lang="en-US" dirty="0"/>
+              <a:t>Sources</a:t>
+            </a:r>
+          </a:p>
+        </p:txBody>
+      </p:sp>
+      <p:sp>
+        <p:nvSpPr>
+          <p:cNvPr id="3" name="Content Placeholder 2">
+            <a:extLst>
+              <a:ext uri="{FF2B5EF4-FFF2-40B4-BE49-F238E27FC236}">
+                <a16:creationId xmlns:a16="http://schemas.microsoft.com/office/drawing/2014/main" id="{97CD133F-D41F-92C8-BEDD-959D30494575}"/>
+              </a:ext>
+            </a:extLst>
+          </p:cNvPr>
+          <p:cNvSpPr>
+            <a:spLocks noGrp="1"/>
+          </p:cNvSpPr>
+          <p:nvPr>
+            <p:ph idx="1"/>
+          </p:nvPr>
+        </p:nvSpPr>
+        <p:spPr/>
+        <p:txBody>
+          <a:bodyPr vert="horz" lIns="91440" tIns="45720" rIns="91440" bIns="45720" rtlCol="0" anchor="t">
+            <a:normAutofit/>
+          </a:bodyPr>
+          <a:lstStyle/>
+          <a:p>
+            <a:pPr marL="0" indent="0">
+              <a:buNone/>
+            </a:pPr>
+            <a:r>
+              <a:rPr lang="en-US" dirty="0">
+                <a:ea typeface="+mn-lt"/>
+                <a:cs typeface="+mn-lt"/>
+                <a:hlinkClick r:id="rId2"/>
+              </a:rPr>
+              <a:t>https://waterdata.usgs.gov/nwis</a:t>
+            </a:r>
+            <a:endParaRPr lang="en-US"/>
+          </a:p>
+          <a:p>
+            <a:pPr marL="0" indent="0">
+              <a:buNone/>
+            </a:pPr>
+            <a:endParaRPr lang="en-US" dirty="0"/>
+          </a:p>
+          <a:p>
+            <a:pPr marL="0" indent="0">
+              <a:buNone/>
+            </a:pPr>
+            <a:r>
+              <a:rPr lang="en-US" dirty="0">
+                <a:ea typeface="+mn-lt"/>
+                <a:cs typeface="+mn-lt"/>
+                <a:hlinkClick r:id="rId3"/>
+              </a:rPr>
+              <a:t>https://map.purpleair.com/</a:t>
+            </a:r>
+            <a:endParaRPr lang="en-US"/>
+          </a:p>
+          <a:p>
+            <a:pPr marL="0" indent="0">
+              <a:buNone/>
+            </a:pPr>
+            <a:endParaRPr lang="en-US" dirty="0"/>
+          </a:p>
+          <a:p>
+            <a:pPr marL="0" indent="0">
+              <a:buNone/>
+            </a:pPr>
+            <a:r>
+              <a:rPr lang="en-US" dirty="0">
+                <a:ea typeface="+mn-lt"/>
+                <a:cs typeface="+mn-lt"/>
+                <a:hlinkClick r:id="rId4"/>
+              </a:rPr>
+              <a:t>https://www.tceq.texas.gov/agency/data</a:t>
+            </a:r>
+            <a:endParaRPr lang="en-US"/>
+          </a:p>
+          <a:p>
+            <a:pPr marL="0" indent="0">
+              <a:buNone/>
+            </a:pPr>
+            <a:endParaRPr lang="en-US" dirty="0"/>
+          </a:p>
+          <a:p>
+            <a:pPr marL="0" indent="0">
+              <a:buNone/>
+            </a:pPr>
+            <a:r>
+              <a:rPr lang="en-US" dirty="0">
+                <a:ea typeface="+mn-lt"/>
+                <a:cs typeface="+mn-lt"/>
+                <a:hlinkClick r:id="rId5"/>
+              </a:rPr>
+              <a:t>https://github.com/AndrewCorry/Capstone_Specialization/blob/main/AirQualityAndWaterQuality.ipynb</a:t>
+            </a:r>
+            <a:endParaRPr lang="en-US"/>
+          </a:p>
+          <a:p>
+            <a:pPr marL="0" indent="0">
+              <a:buNone/>
+            </a:pPr>
+            <a:endParaRPr lang="en-US" dirty="0"/>
+          </a:p>
+          <a:p>
+            <a:pPr marL="0" indent="0">
+              <a:buNone/>
+            </a:pPr>
+            <a:endParaRPr lang="en-US" dirty="0"/>
+          </a:p>
+          <a:p>
+            <a:pPr marL="0" indent="0">
+              <a:buNone/>
+            </a:pPr>
+            <a:endParaRPr lang="en-US" dirty="0"/>
+          </a:p>
+          <a:p>
+            <a:endParaRPr lang="en-US" dirty="0"/>
+          </a:p>
+        </p:txBody>
+      </p:sp>
+    </p:spTree>
+    <p:extLst>
+      <p:ext uri="{BB962C8B-B14F-4D97-AF65-F5344CB8AC3E}">
+        <p14:creationId xmlns:p14="http://schemas.microsoft.com/office/powerpoint/2010/main" val="4289718752"/>
+      </p:ext>
+    </p:extLst>
+  </p:cSld>
+  <p:clrMapOvr>
+    <a:masterClrMapping/>
+  </p:clrMapOvr>
+</p:sld>
+</file>
+
 <file path=ppt/slides/slide2.xml><?xml version="1.0" encoding="utf-8"?>
 <p:sld xmlns:a="http://schemas.openxmlformats.org/drawingml/2006/main" xmlns:r="http://schemas.openxmlformats.org/officeDocument/2006/relationships" xmlns:p="http://schemas.openxmlformats.org/presentationml/2006/main">
   <p:cSld>
@@ -7106,7 +7286,12 @@
             <p:ph idx="1"/>
           </p:nvPr>
         </p:nvSpPr>
-        <p:spPr/>
+        <p:spPr>
+          <a:xfrm>
+            <a:off x="441477" y="2069875"/>
+            <a:ext cx="9875739" cy="3880773"/>
+          </a:xfrm>
+        </p:spPr>
         <p:txBody>
           <a:bodyPr vert="horz" lIns="91440" tIns="45720" rIns="91440" bIns="45720" rtlCol="0" anchor="t">
             <a:normAutofit/>
@@ -7117,18 +7302,15 @@
               <a:buNone/>
             </a:pPr>
             <a:r>
-              <a:rPr lang="en-US" sz="1800"/>
+              <a:rPr lang="en-US" sz="1800" dirty="0"/>
               <a:t>Within the limited timeframe and limited area of our data</a:t>
             </a:r>
           </a:p>
           <a:p>
-            <a:pPr marL="0" indent="0" algn="ctr">
-              <a:lnSpc>
-                <a:spcPct val="200000"/>
-              </a:lnSpc>
+            <a:pPr marL="800100" lvl="2" indent="0">
               <a:buNone/>
             </a:pPr>
-            <a:endParaRPr lang="en-US"/>
+            <a:endParaRPr lang="en-US" sz="1800" dirty="0"/>
           </a:p>
           <a:p>
             <a:pPr lvl="1">
@@ -7139,7 +7321,7 @@
               <a:buChar char="ü"/>
             </a:pPr>
             <a:r>
-              <a:rPr lang="en-US"/>
+              <a:rPr lang="en-US" sz="1800" dirty="0"/>
               <a:t>PM 2.5 might have no effect on the pH of surrounding water</a:t>
             </a:r>
           </a:p>
@@ -7152,7 +7334,7 @@
               <a:buChar char="ü"/>
             </a:pPr>
             <a:r>
-              <a:rPr lang="en-US"/>
+              <a:rPr lang="en-US" sz="1800" dirty="0"/>
               <a:t>PM 2.5 might have a beneficial effect on the dissolved oxygen of surrounding water</a:t>
             </a:r>
           </a:p>
